--- a/02-models/slides.pptx
+++ b/02-models/slides.pptx
@@ -16,9 +16,12 @@
     <p:sldId id="264" r:id="rId10"/>
     <p:sldId id="265" r:id="rId11"/>
     <p:sldId id="266" r:id="rId12"/>
+    <p:sldId id="267" r:id="rId13"/>
+    <p:sldId id="268" r:id="rId14"/>
+    <p:sldId id="269" r:id="rId15"/>
   </p:sldIdLst>
   <p:notesMasterIdLst>
-    <p:notesMasterId r:id="rId13"/>
+    <p:notesMasterId r:id="rId16"/>
   </p:notesMasterIdLst>
   <p:sldSz cx="12192000" cy="6858000"/>
   <p:notesSz cx="6858000" cy="12192000"/>
@@ -512,9 +515,9 @@
           <a:p>
             <a:r>
               <a:rPr lang="en-US" dirty="0"/>
-              <a:t>This is the half-day deep dive on the Models layer. Same lab box throughout:
-RTX 5090, 32 GB. Everything here maps to 02-models/README.md and the labs/.
-Pace: ~4 slides of concept, then go to the terminal.</a:t>
+              <a:t>The Models layer (Layer 2). Labs run on a free Kaggle notebook GPU (T4, 16 GB) so
+every student can reproduce them. Maps 1:1 to 02-models/README.md. Pace: a few
+slides of concept, then the notebook.</a:t>
             </a:r>
             <a:endParaRPr lang="en-US" dirty="0"/>
           </a:p>
@@ -602,8 +605,8 @@
           <a:p>
             <a:r>
               <a:rPr lang="en-US" dirty="0"/>
-              <a:t>Close the loop. A 5090 can't pre-train — and that's the lesson. MLOps turns a
-mystery .bin into a tracked, versioned, deployable artifact.</a:t>
+              <a:t>Trust your held-out task eval over leaderboards. This eval becomes a CI gate — a
+regression blocks the deploy.</a:t>
             </a:r>
             <a:endParaRPr lang="en-US" dirty="0"/>
           </a:p>
@@ -691,8 +694,8 @@
           <a:p>
             <a:r>
               <a:rPr lang="en-US" dirty="0"/>
-              <a:t>Recap, then hands-on time. If short: VRAM table, LoRA, and the eval-as-CI-gate
-are the must-keeps.</a:t>
+              <a:t>We explain training but don't run it — a free Kaggle GPU can't, and that's the
+lesson. Continued pre-training is the realistic "build" option, not from-zero.</a:t>
             </a:r>
             <a:endParaRPr lang="en-US" dirty="0"/>
           </a:p>
@@ -734,6 +737,276 @@
 </p:notes>
 </file>
 
+<file path=ppt/notesSlides/notesSlide12.xml><?xml version="1.0" encoding="utf-8"?>
+<p:notes xmlns:a="http://schemas.openxmlformats.org/drawingml/2006/main" xmlns:r="http://schemas.openxmlformats.org/officeDocument/2006/relationships" xmlns:p="http://schemas.openxmlformats.org/presentationml/2006/main">
+  <p:cSld>
+    <p:spTree>
+      <p:nvGrpSpPr>
+        <p:cNvPr id="1" name=""/>
+        <p:cNvGrpSpPr/>
+        <p:nvPr/>
+      </p:nvGrpSpPr>
+      <p:grpSpPr>
+        <a:xfrm>
+          <a:off x="0" y="0"/>
+          <a:ext cx="0" cy="0"/>
+          <a:chOff x="0" y="0"/>
+          <a:chExt cx="0" cy="0"/>
+        </a:xfrm>
+      </p:grpSpPr>
+      <p:sp>
+        <p:nvSpPr>
+          <p:cNvPr id="2" name="Slide Image Placeholder 1"/>
+          <p:cNvSpPr>
+            <a:spLocks noGrp="1" noRot="1" noChangeAspect="1"/>
+          </p:cNvSpPr>
+          <p:nvPr>
+            <p:ph type="sldImg"/>
+          </p:nvPr>
+        </p:nvSpPr>
+        <p:spPr/>
+      </p:sp>
+      <p:sp>
+        <p:nvSpPr>
+          <p:cNvPr id="3" name="Notes Placeholder 2"/>
+          <p:cNvSpPr>
+            <a:spLocks noGrp="1"/>
+          </p:cNvSpPr>
+          <p:nvPr>
+            <p:ph type="body" idx="1"/>
+          </p:nvPr>
+        </p:nvSpPr>
+        <p:spPr/>
+        <p:txBody>
+          <a:bodyPr/>
+          <a:lstStyle/>
+          <a:p>
+            <a:r>
+              <a:rPr lang="en-US" dirty="0"/>
+              <a:t>The point: MLOps turns each step into a tracked artifact with a known input and
+output, and inserts the eval gate so a regression can't ship. Tooling underneath:
+MLflow/W&amp;B (tracking), MLflow Registry/HF Hub/DVC (versioning), CI gates, drift
+monitors. Lab 2 wires in MLflow so tracking isn't a separate chore.</a:t>
+            </a:r>
+            <a:endParaRPr lang="en-US" dirty="0"/>
+          </a:p>
+        </p:txBody>
+      </p:sp>
+      <p:sp>
+        <p:nvSpPr>
+          <p:cNvPr id="4" name="Slide Number Placeholder 3"/>
+          <p:cNvSpPr>
+            <a:spLocks noGrp="1"/>
+          </p:cNvSpPr>
+          <p:nvPr>
+            <p:ph type="sldNum" sz="quarter" idx="10"/>
+          </p:nvPr>
+        </p:nvSpPr>
+        <p:spPr/>
+        <p:txBody>
+          <a:bodyPr/>
+          <a:lstStyle/>
+          <a:p>
+            <a:fld id="{F7021451-1387-4CA6-816F-3879F97B5CBC}" type="slidenum">
+              <a:rPr lang="en-US"/>
+              <a:t>12</a:t>
+            </a:fld>
+            <a:endParaRPr lang="en-US"/>
+          </a:p>
+        </p:txBody>
+      </p:sp>
+    </p:spTree>
+    <p:extLst>
+      <p:ext uri="{BB962C8B-B14F-4D97-AF65-F5344CB8AC3E}">
+        <p14:creationId xmlns:p14="http://schemas.microsoft.com/office/powerpoint/2010/main" val="1024086991"/>
+      </p:ext>
+    </p:extLst>
+  </p:cSld>
+  <p:clrMapOvr>
+    <a:masterClrMapping/>
+  </p:clrMapOvr>
+</p:notes>
+</file>
+
+<file path=ppt/notesSlides/notesSlide13.xml><?xml version="1.0" encoding="utf-8"?>
+<p:notes xmlns:a="http://schemas.openxmlformats.org/drawingml/2006/main" xmlns:r="http://schemas.openxmlformats.org/officeDocument/2006/relationships" xmlns:p="http://schemas.openxmlformats.org/presentationml/2006/main">
+  <p:cSld>
+    <p:spTree>
+      <p:nvGrpSpPr>
+        <p:cNvPr id="1" name=""/>
+        <p:cNvGrpSpPr/>
+        <p:nvPr/>
+      </p:nvGrpSpPr>
+      <p:grpSpPr>
+        <a:xfrm>
+          <a:off x="0" y="0"/>
+          <a:ext cx="0" cy="0"/>
+          <a:chOff x="0" y="0"/>
+          <a:chExt cx="0" cy="0"/>
+        </a:xfrm>
+      </p:grpSpPr>
+      <p:sp>
+        <p:nvSpPr>
+          <p:cNvPr id="2" name="Slide Image Placeholder 1"/>
+          <p:cNvSpPr>
+            <a:spLocks noGrp="1" noRot="1" noChangeAspect="1"/>
+          </p:cNvSpPr>
+          <p:nvPr>
+            <p:ph type="sldImg"/>
+          </p:nvPr>
+        </p:nvSpPr>
+        <p:spPr/>
+      </p:sp>
+      <p:sp>
+        <p:nvSpPr>
+          <p:cNvPr id="3" name="Notes Placeholder 2"/>
+          <p:cNvSpPr>
+            <a:spLocks noGrp="1"/>
+          </p:cNvSpPr>
+          <p:nvPr>
+            <p:ph type="body" idx="1"/>
+          </p:nvPr>
+        </p:nvSpPr>
+        <p:spPr/>
+        <p:txBody>
+          <a:bodyPr/>
+          <a:lstStyle/>
+          <a:p>
+            <a:r>
+              <a:rPr lang="en-US" dirty="0"/>
+              <a:t>The mirror of the SLM argument. Don't sell it as prediction — the book predates
+LLMs. The two theses are the keepers: smart isn't safe; wrong-goal competence is
+the danger.</a:t>
+            </a:r>
+            <a:endParaRPr lang="en-US" dirty="0"/>
+          </a:p>
+        </p:txBody>
+      </p:sp>
+      <p:sp>
+        <p:nvSpPr>
+          <p:cNvPr id="4" name="Slide Number Placeholder 3"/>
+          <p:cNvSpPr>
+            <a:spLocks noGrp="1"/>
+          </p:cNvSpPr>
+          <p:nvPr>
+            <p:ph type="sldNum" sz="quarter" idx="10"/>
+          </p:nvPr>
+        </p:nvSpPr>
+        <p:spPr/>
+        <p:txBody>
+          <a:bodyPr/>
+          <a:lstStyle/>
+          <a:p>
+            <a:fld id="{F7021451-1387-4CA6-816F-3879F97B5CBC}" type="slidenum">
+              <a:rPr lang="en-US"/>
+              <a:t>13</a:t>
+            </a:fld>
+            <a:endParaRPr lang="en-US"/>
+          </a:p>
+        </p:txBody>
+      </p:sp>
+    </p:spTree>
+    <p:extLst>
+      <p:ext uri="{BB962C8B-B14F-4D97-AF65-F5344CB8AC3E}">
+        <p14:creationId xmlns:p14="http://schemas.microsoft.com/office/powerpoint/2010/main" val="1024086991"/>
+      </p:ext>
+    </p:extLst>
+  </p:cSld>
+  <p:clrMapOvr>
+    <a:masterClrMapping/>
+  </p:clrMapOvr>
+</p:notes>
+</file>
+
+<file path=ppt/notesSlides/notesSlide14.xml><?xml version="1.0" encoding="utf-8"?>
+<p:notes xmlns:a="http://schemas.openxmlformats.org/drawingml/2006/main" xmlns:r="http://schemas.openxmlformats.org/officeDocument/2006/relationships" xmlns:p="http://schemas.openxmlformats.org/presentationml/2006/main">
+  <p:cSld>
+    <p:spTree>
+      <p:nvGrpSpPr>
+        <p:cNvPr id="1" name=""/>
+        <p:cNvGrpSpPr/>
+        <p:nvPr/>
+      </p:nvGrpSpPr>
+      <p:grpSpPr>
+        <a:xfrm>
+          <a:off x="0" y="0"/>
+          <a:ext cx="0" cy="0"/>
+          <a:chOff x="0" y="0"/>
+          <a:chExt cx="0" cy="0"/>
+        </a:xfrm>
+      </p:grpSpPr>
+      <p:sp>
+        <p:nvSpPr>
+          <p:cNvPr id="2" name="Slide Image Placeholder 1"/>
+          <p:cNvSpPr>
+            <a:spLocks noGrp="1" noRot="1" noChangeAspect="1"/>
+          </p:cNvSpPr>
+          <p:nvPr>
+            <p:ph type="sldImg"/>
+          </p:nvPr>
+        </p:nvSpPr>
+        <p:spPr/>
+      </p:sp>
+      <p:sp>
+        <p:nvSpPr>
+          <p:cNvPr id="3" name="Notes Placeholder 2"/>
+          <p:cNvSpPr>
+            <a:spLocks noGrp="1"/>
+          </p:cNvSpPr>
+          <p:nvPr>
+            <p:ph type="body" idx="1"/>
+          </p:nvPr>
+        </p:nvSpPr>
+        <p:spPr/>
+        <p:txBody>
+          <a:bodyPr/>
+          <a:lstStyle/>
+          <a:p>
+            <a:r>
+              <a:rPr lang="en-US" dirty="0"/>
+              <a:t>The part builders use. Students already build oracles and genies. Bostrom's
+ranking (oracle/tool safe, sovereign risky) is a real design choice in layer 4.</a:t>
+            </a:r>
+            <a:endParaRPr lang="en-US" dirty="0"/>
+          </a:p>
+        </p:txBody>
+      </p:sp>
+      <p:sp>
+        <p:nvSpPr>
+          <p:cNvPr id="4" name="Slide Number Placeholder 3"/>
+          <p:cNvSpPr>
+            <a:spLocks noGrp="1"/>
+          </p:cNvSpPr>
+          <p:nvPr>
+            <p:ph type="sldNum" sz="quarter" idx="10"/>
+          </p:nvPr>
+        </p:nvSpPr>
+        <p:spPr/>
+        <p:txBody>
+          <a:bodyPr/>
+          <a:lstStyle/>
+          <a:p>
+            <a:fld id="{F7021451-1387-4CA6-816F-3879F97B5CBC}" type="slidenum">
+              <a:rPr lang="en-US"/>
+              <a:t>14</a:t>
+            </a:fld>
+            <a:endParaRPr lang="en-US"/>
+          </a:p>
+        </p:txBody>
+      </p:sp>
+    </p:spTree>
+    <p:extLst>
+      <p:ext uri="{BB962C8B-B14F-4D97-AF65-F5344CB8AC3E}">
+        <p14:creationId xmlns:p14="http://schemas.microsoft.com/office/powerpoint/2010/main" val="1024086991"/>
+      </p:ext>
+    </p:extLst>
+  </p:cSld>
+  <p:clrMapOvr>
+    <a:masterClrMapping/>
+  </p:clrMapOvr>
+</p:notes>
+</file>
+
 <file path=ppt/notesSlides/notesSlide2.xml><?xml version="1.0" encoding="utf-8"?>
 <p:notes xmlns:a="http://schemas.openxmlformats.org/drawingml/2006/main" xmlns:r="http://schemas.openxmlformats.org/officeDocument/2006/relationships" xmlns:p="http://schemas.openxmlformats.org/presentationml/2006/main">
   <p:cSld>
@@ -780,8 +1053,8 @@
           <a:p>
             <a:r>
               <a:rPr lang="en-US" dirty="0"/>
-              <a:t>Set the frame: most "AI model work" is choosing and serving, not training. The
-arrows are the agenda for the rest of the deck.</a:t>
+              <a:t>This is the agenda. Serving = Lab 1, Fine-tune = Lab 2, Evaluate = Lab 3.
+RAG-for-knowledge vs fine-tune-for-behaviour is the line students forget.</a:t>
             </a:r>
             <a:endParaRPr lang="en-US" dirty="0"/>
           </a:p>
@@ -869,8 +1142,8 @@
           <a:p>
             <a:r>
               <a:rPr lang="en-US" dirty="0"/>
-              <a:t>You're never picking "the best model" — you're picking the best for a task, a
-budget, and a GPU. Qwen2.5 is our default: Apache-2.0, ungated.</a:t>
+              <a:t>"Open-weights" ≠ "open-source": you get weights, not always data or a free
+licence. Qwen2.5 (Apache-2.0) is our default — ungated, commercial-friendly.</a:t>
             </a:r>
             <a:endParaRPr lang="en-US" dirty="0"/>
           </a:p>
@@ -958,8 +1231,8 @@
           <a:p>
             <a:r>
               <a:rPr lang="en-US" dirty="0"/>
-              <a:t>Burn this in. Every "will it fit?" question answers from here. Plus the hidden
-cost: KV cache grows with context × concurrency — weights aren't the whole story.</a:t>
+              <a:t>Every "will it fit?" answers from here. Hidden cost: KV cache grows with
+context × concurrency — weights aren't the whole story.</a:t>
             </a:r>
             <a:endParaRPr lang="en-US" dirty="0"/>
           </a:p>
@@ -1047,10 +1320,8 @@
           <a:p>
             <a:r>
               <a:rPr lang="en-US" dirty="0"/>
-              <a:t>The mirror of the SLM argument: we just praised narrow, specialized models; this
-is the opposite pole. Don't sell it as prediction — the book predates LLMs. The
-two theses are the keepers: smart doesn't mean safe, and competence at the wrong
-goal is the danger. Paperclip maximizer = the one-line icon.</a:t>
+              <a:t>"Which weights are in prod, and may we use them commercially?" should be
+answerable from one place. Licence traps bite at deploy time, not demo time.</a:t>
             </a:r>
             <a:endParaRPr lang="en-US" dirty="0"/>
           </a:p>
@@ -1138,9 +1409,10 @@
           <a:p>
             <a:r>
               <a:rPr lang="en-US" dirty="0"/>
-              <a:t>This is the part builders can actually use. Walk the right column: students are
-already building oracles and genies. Bostrom's safety ranking (oracle/tool safe,
-sovereign risky) is a real choice they make when wiring up agents in layer 4.</a:t>
+              <a:t>The durable point, not the news cycle. Strategy aside (conceptual, not on slide):
+permissive licences buy mindshare and pressure closed vendors; "community"
+licences try to keep PR upside + commercial control, and draw community backlash.
+Trim of fabricated benchmark/geopolitics specifics is deliberate — keep it true.</a:t>
             </a:r>
             <a:endParaRPr lang="en-US" dirty="0"/>
           </a:p>
@@ -1228,9 +1500,8 @@
           <a:p>
             <a:r>
               <a:rPr lang="en-US" dirty="0"/>
-              <a:t>Go to terminal: download.sh (once) then serve_bench.sh. Validated on the 5090:
-Q4 3.8 GB / ~199 tok-s vs fp16 7.8 GB / ~137 tok-s — same model. vLLM is an
-optional add to show continuous batching pulling ahead at concurrency.</a:t>
+              <a:t>vLLM trades a little latency for big throughput via batching; Ollama optimizes the
+single-user case. PagedAttention exists to manage the KV cache.</a:t>
             </a:r>
             <a:endParaRPr lang="en-US" dirty="0"/>
           </a:p>
@@ -1318,8 +1589,8 @@
           <a:p>
             <a:r>
               <a:rPr lang="en-US" dirty="0"/>
-              <a:t>This is the headline lab. Before/after is dramatic: base rambles, tuned emits
-clean JSON. MLflow makes the run reproducible — params, loss curve, adapter.</a:t>
+              <a:t>Notebook lab1_serving_kaggle.ipynb. The point: memory win is universal, speed win
+is hardware-dependent. Measure VRAM live.</a:t>
             </a:r>
             <a:endParaRPr lang="en-US" dirty="0"/>
           </a:p>
@@ -1407,8 +1678,8 @@
           <a:p>
             <a:r>
               <a:rPr lang="en-US" dirty="0"/>
-              <a:t>Trust your held-out task eval over leaderboards. This script becomes a CI gate —
-a regression blocks deploy, just like checkov blocks terraform apply.</a:t>
+              <a:t>Headline lab. Before/after is dramatic: base rambles, tuned emits clean JSON.
+QLoRA fits the T4. MLflow makes the run reproducible.</a:t>
             </a:r>
             <a:endParaRPr lang="en-US" dirty="0"/>
           </a:p>
@@ -1838,6 +2109,123 @@
 <file path=ppt/slides/slide11.xml><?xml version="1.0" encoding="utf-8"?>
 <p:sld xmlns:a="http://schemas.openxmlformats.org/drawingml/2006/main" xmlns:r="http://schemas.openxmlformats.org/officeDocument/2006/relationships" xmlns:p="http://schemas.openxmlformats.org/presentationml/2006/main">
   <p:cSld name="Slide 11">
+    <p:bg>
+      <p:bgPr>
+        <a:blipFill dpi="0" rotWithShape="1">
+          <a:blip r:embed="rId1">
+            <a:lum/>
+          </a:blip>
+          <a:srcRect/>
+          <a:stretch>
+            <a:fillRect/>
+          </a:stretch>
+        </a:blipFill>
+        <a:effectLst/>
+      </p:bgPr>
+    </p:bg>
+    <p:spTree>
+      <p:nvGrpSpPr>
+        <p:cNvPr id="1" name=""/>
+        <p:cNvGrpSpPr/>
+        <p:nvPr/>
+      </p:nvGrpSpPr>
+      <p:grpSpPr>
+        <a:xfrm>
+          <a:off x="0" y="0"/>
+          <a:ext cx="0" cy="0"/>
+          <a:chOff x="0" y="0"/>
+          <a:chExt cx="0" cy="0"/>
+        </a:xfrm>
+      </p:grpSpPr>
+    </p:spTree>
+  </p:cSld>
+  <p:clrMapOvr>
+    <a:masterClrMapping/>
+  </p:clrMapOvr>
+</p:sld>
+</file>
+
+<file path=ppt/slides/slide12.xml><?xml version="1.0" encoding="utf-8"?>
+<p:sld xmlns:a="http://schemas.openxmlformats.org/drawingml/2006/main" xmlns:r="http://schemas.openxmlformats.org/officeDocument/2006/relationships" xmlns:p="http://schemas.openxmlformats.org/presentationml/2006/main">
+  <p:cSld name="Slide 12">
+    <p:bg>
+      <p:bgPr>
+        <a:blipFill dpi="0" rotWithShape="1">
+          <a:blip r:embed="rId1">
+            <a:lum/>
+          </a:blip>
+          <a:srcRect/>
+          <a:stretch>
+            <a:fillRect/>
+          </a:stretch>
+        </a:blipFill>
+        <a:effectLst/>
+      </p:bgPr>
+    </p:bg>
+    <p:spTree>
+      <p:nvGrpSpPr>
+        <p:cNvPr id="1" name=""/>
+        <p:cNvGrpSpPr/>
+        <p:nvPr/>
+      </p:nvGrpSpPr>
+      <p:grpSpPr>
+        <a:xfrm>
+          <a:off x="0" y="0"/>
+          <a:ext cx="0" cy="0"/>
+          <a:chOff x="0" y="0"/>
+          <a:chExt cx="0" cy="0"/>
+        </a:xfrm>
+      </p:grpSpPr>
+    </p:spTree>
+  </p:cSld>
+  <p:clrMapOvr>
+    <a:masterClrMapping/>
+  </p:clrMapOvr>
+</p:sld>
+</file>
+
+<file path=ppt/slides/slide13.xml><?xml version="1.0" encoding="utf-8"?>
+<p:sld xmlns:a="http://schemas.openxmlformats.org/drawingml/2006/main" xmlns:r="http://schemas.openxmlformats.org/officeDocument/2006/relationships" xmlns:p="http://schemas.openxmlformats.org/presentationml/2006/main">
+  <p:cSld name="Slide 13">
+    <p:bg>
+      <p:bgPr>
+        <a:blipFill dpi="0" rotWithShape="1">
+          <a:blip r:embed="rId1">
+            <a:lum/>
+          </a:blip>
+          <a:srcRect/>
+          <a:stretch>
+            <a:fillRect/>
+          </a:stretch>
+        </a:blipFill>
+        <a:effectLst/>
+      </p:bgPr>
+    </p:bg>
+    <p:spTree>
+      <p:nvGrpSpPr>
+        <p:cNvPr id="1" name=""/>
+        <p:cNvGrpSpPr/>
+        <p:nvPr/>
+      </p:nvGrpSpPr>
+      <p:grpSpPr>
+        <a:xfrm>
+          <a:off x="0" y="0"/>
+          <a:ext cx="0" cy="0"/>
+          <a:chOff x="0" y="0"/>
+          <a:chExt cx="0" cy="0"/>
+        </a:xfrm>
+      </p:grpSpPr>
+    </p:spTree>
+  </p:cSld>
+  <p:clrMapOvr>
+    <a:masterClrMapping/>
+  </p:clrMapOvr>
+</p:sld>
+</file>
+
+<file path=ppt/slides/slide14.xml><?xml version="1.0" encoding="utf-8"?>
+<p:sld xmlns:a="http://schemas.openxmlformats.org/drawingml/2006/main" xmlns:r="http://schemas.openxmlformats.org/officeDocument/2006/relationships" xmlns:p="http://schemas.openxmlformats.org/presentationml/2006/main">
+  <p:cSld name="Slide 14">
     <p:bg>
       <p:bgPr>
         <a:blipFill dpi="0" rotWithShape="1">

--- a/02-models/slides.pptx
+++ b/02-models/slides.pptx
@@ -19,9 +19,10 @@
     <p:sldId id="267" r:id="rId13"/>
     <p:sldId id="268" r:id="rId14"/>
     <p:sldId id="269" r:id="rId15"/>
+    <p:sldId id="270" r:id="rId16"/>
   </p:sldIdLst>
   <p:notesMasterIdLst>
-    <p:notesMasterId r:id="rId16"/>
+    <p:notesMasterId r:id="rId17"/>
   </p:notesMasterIdLst>
   <p:sldSz cx="12192000" cy="6858000"/>
   <p:notesSz cx="6858000" cy="12192000"/>
@@ -874,6 +875,99 @@
           <a:p>
             <a:r>
               <a:rPr lang="en-US" dirty="0"/>
+              <a:t>The capstone: our seven phases aren't ad-hoc — they're the lifecycle every
+platform implements. Kubeflow = open, on your Kubernetes; SageMaker = AWS-managed,
+same stages. Keep Kubeflow's real component names. The labs/kubeflow-sagemaker/
+lab re-expresses the Kaggle fine-tune in both: Kubeflow Trainer takes a function,
+SageMaker takes a script, both run the identical train.py. The eval gate (Lab 3)
+becomes a Pipelines step that blocks a regressed deploy.</a:t>
+            </a:r>
+            <a:endParaRPr lang="en-US" dirty="0"/>
+          </a:p>
+        </p:txBody>
+      </p:sp>
+      <p:sp>
+        <p:nvSpPr>
+          <p:cNvPr id="4" name="Slide Number Placeholder 3"/>
+          <p:cNvSpPr>
+            <a:spLocks noGrp="1"/>
+          </p:cNvSpPr>
+          <p:nvPr>
+            <p:ph type="sldNum" sz="quarter" idx="10"/>
+          </p:nvPr>
+        </p:nvSpPr>
+        <p:spPr/>
+        <p:txBody>
+          <a:bodyPr/>
+          <a:lstStyle/>
+          <a:p>
+            <a:fld id="{F7021451-1387-4CA6-816F-3879F97B5CBC}" type="slidenum">
+              <a:rPr lang="en-US"/>
+              <a:t>13</a:t>
+            </a:fld>
+            <a:endParaRPr lang="en-US"/>
+          </a:p>
+        </p:txBody>
+      </p:sp>
+    </p:spTree>
+    <p:extLst>
+      <p:ext uri="{BB962C8B-B14F-4D97-AF65-F5344CB8AC3E}">
+        <p14:creationId xmlns:p14="http://schemas.microsoft.com/office/powerpoint/2010/main" val="1024086991"/>
+      </p:ext>
+    </p:extLst>
+  </p:cSld>
+  <p:clrMapOvr>
+    <a:masterClrMapping/>
+  </p:clrMapOvr>
+</p:notes>
+</file>
+
+<file path=ppt/notesSlides/notesSlide14.xml><?xml version="1.0" encoding="utf-8"?>
+<p:notes xmlns:a="http://schemas.openxmlformats.org/drawingml/2006/main" xmlns:r="http://schemas.openxmlformats.org/officeDocument/2006/relationships" xmlns:p="http://schemas.openxmlformats.org/presentationml/2006/main">
+  <p:cSld>
+    <p:spTree>
+      <p:nvGrpSpPr>
+        <p:cNvPr id="1" name=""/>
+        <p:cNvGrpSpPr/>
+        <p:nvPr/>
+      </p:nvGrpSpPr>
+      <p:grpSpPr>
+        <a:xfrm>
+          <a:off x="0" y="0"/>
+          <a:ext cx="0" cy="0"/>
+          <a:chOff x="0" y="0"/>
+          <a:chExt cx="0" cy="0"/>
+        </a:xfrm>
+      </p:grpSpPr>
+      <p:sp>
+        <p:nvSpPr>
+          <p:cNvPr id="2" name="Slide Image Placeholder 1"/>
+          <p:cNvSpPr>
+            <a:spLocks noGrp="1" noRot="1" noChangeAspect="1"/>
+          </p:cNvSpPr>
+          <p:nvPr>
+            <p:ph type="sldImg"/>
+          </p:nvPr>
+        </p:nvSpPr>
+        <p:spPr/>
+      </p:sp>
+      <p:sp>
+        <p:nvSpPr>
+          <p:cNvPr id="3" name="Notes Placeholder 2"/>
+          <p:cNvSpPr>
+            <a:spLocks noGrp="1"/>
+          </p:cNvSpPr>
+          <p:nvPr>
+            <p:ph type="body" idx="1"/>
+          </p:nvPr>
+        </p:nvSpPr>
+        <p:spPr/>
+        <p:txBody>
+          <a:bodyPr/>
+          <a:lstStyle/>
+          <a:p>
+            <a:r>
+              <a:rPr lang="en-US" dirty="0"/>
               <a:t>The mirror of the SLM argument. Don't sell it as prediction — the book predates
 LLMs. The two theses are the keepers: smart isn't safe; wrong-goal competence is
 the danger.</a:t>
@@ -899,7 +993,7 @@
           <a:p>
             <a:fld id="{F7021451-1387-4CA6-816F-3879F97B5CBC}" type="slidenum">
               <a:rPr lang="en-US"/>
-              <a:t>13</a:t>
+              <a:t>14</a:t>
             </a:fld>
             <a:endParaRPr lang="en-US"/>
           </a:p>
@@ -918,7 +1012,7 @@
 </p:notes>
 </file>
 
-<file path=ppt/notesSlides/notesSlide14.xml><?xml version="1.0" encoding="utf-8"?>
+<file path=ppt/notesSlides/notesSlide15.xml><?xml version="1.0" encoding="utf-8"?>
 <p:notes xmlns:a="http://schemas.openxmlformats.org/drawingml/2006/main" xmlns:r="http://schemas.openxmlformats.org/officeDocument/2006/relationships" xmlns:p="http://schemas.openxmlformats.org/presentationml/2006/main">
   <p:cSld>
     <p:spTree>
@@ -988,7 +1082,7 @@
           <a:p>
             <a:fld id="{F7021451-1387-4CA6-816F-3879F97B5CBC}" type="slidenum">
               <a:rPr lang="en-US"/>
-              <a:t>14</a:t>
+              <a:t>15</a:t>
             </a:fld>
             <a:endParaRPr lang="en-US"/>
           </a:p>
@@ -2226,6 +2320,45 @@
 <file path=ppt/slides/slide14.xml><?xml version="1.0" encoding="utf-8"?>
 <p:sld xmlns:a="http://schemas.openxmlformats.org/drawingml/2006/main" xmlns:r="http://schemas.openxmlformats.org/officeDocument/2006/relationships" xmlns:p="http://schemas.openxmlformats.org/presentationml/2006/main">
   <p:cSld name="Slide 14">
+    <p:bg>
+      <p:bgPr>
+        <a:blipFill dpi="0" rotWithShape="1">
+          <a:blip r:embed="rId1">
+            <a:lum/>
+          </a:blip>
+          <a:srcRect/>
+          <a:stretch>
+            <a:fillRect/>
+          </a:stretch>
+        </a:blipFill>
+        <a:effectLst/>
+      </p:bgPr>
+    </p:bg>
+    <p:spTree>
+      <p:nvGrpSpPr>
+        <p:cNvPr id="1" name=""/>
+        <p:cNvGrpSpPr/>
+        <p:nvPr/>
+      </p:nvGrpSpPr>
+      <p:grpSpPr>
+        <a:xfrm>
+          <a:off x="0" y="0"/>
+          <a:ext cx="0" cy="0"/>
+          <a:chOff x="0" y="0"/>
+          <a:chExt cx="0" cy="0"/>
+        </a:xfrm>
+      </p:grpSpPr>
+    </p:spTree>
+  </p:cSld>
+  <p:clrMapOvr>
+    <a:masterClrMapping/>
+  </p:clrMapOvr>
+</p:sld>
+</file>
+
+<file path=ppt/slides/slide15.xml><?xml version="1.0" encoding="utf-8"?>
+<p:sld xmlns:a="http://schemas.openxmlformats.org/drawingml/2006/main" xmlns:r="http://schemas.openxmlformats.org/officeDocument/2006/relationships" xmlns:p="http://schemas.openxmlformats.org/presentationml/2006/main">
+  <p:cSld name="Slide 15">
     <p:bg>
       <p:bgPr>
         <a:blipFill dpi="0" rotWithShape="1">

--- a/02-models/slides.pptx
+++ b/02-models/slides.pptx
@@ -19,10 +19,9 @@
     <p:sldId id="267" r:id="rId13"/>
     <p:sldId id="268" r:id="rId14"/>
     <p:sldId id="269" r:id="rId15"/>
-    <p:sldId id="270" r:id="rId16"/>
   </p:sldIdLst>
   <p:notesMasterIdLst>
-    <p:notesMasterId r:id="rId17"/>
+    <p:notesMasterId r:id="rId16"/>
   </p:notesMasterIdLst>
   <p:sldSz cx="12192000" cy="6858000"/>
   <p:notesSz cx="6858000" cy="12192000"/>
@@ -968,96 +967,6 @@
           <a:p>
             <a:r>
               <a:rPr lang="en-US" dirty="0"/>
-              <a:t>The mirror of the SLM argument. Don't sell it as prediction — the book predates
-LLMs. The two theses are the keepers: smart isn't safe; wrong-goal competence is
-the danger.</a:t>
-            </a:r>
-            <a:endParaRPr lang="en-US" dirty="0"/>
-          </a:p>
-        </p:txBody>
-      </p:sp>
-      <p:sp>
-        <p:nvSpPr>
-          <p:cNvPr id="4" name="Slide Number Placeholder 3"/>
-          <p:cNvSpPr>
-            <a:spLocks noGrp="1"/>
-          </p:cNvSpPr>
-          <p:nvPr>
-            <p:ph type="sldNum" sz="quarter" idx="10"/>
-          </p:nvPr>
-        </p:nvSpPr>
-        <p:spPr/>
-        <p:txBody>
-          <a:bodyPr/>
-          <a:lstStyle/>
-          <a:p>
-            <a:fld id="{F7021451-1387-4CA6-816F-3879F97B5CBC}" type="slidenum">
-              <a:rPr lang="en-US"/>
-              <a:t>14</a:t>
-            </a:fld>
-            <a:endParaRPr lang="en-US"/>
-          </a:p>
-        </p:txBody>
-      </p:sp>
-    </p:spTree>
-    <p:extLst>
-      <p:ext uri="{BB962C8B-B14F-4D97-AF65-F5344CB8AC3E}">
-        <p14:creationId xmlns:p14="http://schemas.microsoft.com/office/powerpoint/2010/main" val="1024086991"/>
-      </p:ext>
-    </p:extLst>
-  </p:cSld>
-  <p:clrMapOvr>
-    <a:masterClrMapping/>
-  </p:clrMapOvr>
-</p:notes>
-</file>
-
-<file path=ppt/notesSlides/notesSlide15.xml><?xml version="1.0" encoding="utf-8"?>
-<p:notes xmlns:a="http://schemas.openxmlformats.org/drawingml/2006/main" xmlns:r="http://schemas.openxmlformats.org/officeDocument/2006/relationships" xmlns:p="http://schemas.openxmlformats.org/presentationml/2006/main">
-  <p:cSld>
-    <p:spTree>
-      <p:nvGrpSpPr>
-        <p:cNvPr id="1" name=""/>
-        <p:cNvGrpSpPr/>
-        <p:nvPr/>
-      </p:nvGrpSpPr>
-      <p:grpSpPr>
-        <a:xfrm>
-          <a:off x="0" y="0"/>
-          <a:ext cx="0" cy="0"/>
-          <a:chOff x="0" y="0"/>
-          <a:chExt cx="0" cy="0"/>
-        </a:xfrm>
-      </p:grpSpPr>
-      <p:sp>
-        <p:nvSpPr>
-          <p:cNvPr id="2" name="Slide Image Placeholder 1"/>
-          <p:cNvSpPr>
-            <a:spLocks noGrp="1" noRot="1" noChangeAspect="1"/>
-          </p:cNvSpPr>
-          <p:nvPr>
-            <p:ph type="sldImg"/>
-          </p:nvPr>
-        </p:nvSpPr>
-        <p:spPr/>
-      </p:sp>
-      <p:sp>
-        <p:nvSpPr>
-          <p:cNvPr id="3" name="Notes Placeholder 2"/>
-          <p:cNvSpPr>
-            <a:spLocks noGrp="1"/>
-          </p:cNvSpPr>
-          <p:nvPr>
-            <p:ph type="body" idx="1"/>
-          </p:nvPr>
-        </p:nvSpPr>
-        <p:spPr/>
-        <p:txBody>
-          <a:bodyPr/>
-          <a:lstStyle/>
-          <a:p>
-            <a:r>
-              <a:rPr lang="en-US" dirty="0"/>
               <a:t>The part builders use. Students already build oracles and genies. Bostrom's
 ranking (oracle/tool safe, sovereign risky) is a real design choice in layer 4.</a:t>
             </a:r>
@@ -1082,7 +991,7 @@
           <a:p>
             <a:fld id="{F7021451-1387-4CA6-816F-3879F97B5CBC}" type="slidenum">
               <a:rPr lang="en-US"/>
-              <a:t>15</a:t>
+              <a:t>14</a:t>
             </a:fld>
             <a:endParaRPr lang="en-US"/>
           </a:p>
@@ -2320,45 +2229,6 @@
 <file path=ppt/slides/slide14.xml><?xml version="1.0" encoding="utf-8"?>
 <p:sld xmlns:a="http://schemas.openxmlformats.org/drawingml/2006/main" xmlns:r="http://schemas.openxmlformats.org/officeDocument/2006/relationships" xmlns:p="http://schemas.openxmlformats.org/presentationml/2006/main">
   <p:cSld name="Slide 14">
-    <p:bg>
-      <p:bgPr>
-        <a:blipFill dpi="0" rotWithShape="1">
-          <a:blip r:embed="rId1">
-            <a:lum/>
-          </a:blip>
-          <a:srcRect/>
-          <a:stretch>
-            <a:fillRect/>
-          </a:stretch>
-        </a:blipFill>
-        <a:effectLst/>
-      </p:bgPr>
-    </p:bg>
-    <p:spTree>
-      <p:nvGrpSpPr>
-        <p:cNvPr id="1" name=""/>
-        <p:cNvGrpSpPr/>
-        <p:nvPr/>
-      </p:nvGrpSpPr>
-      <p:grpSpPr>
-        <a:xfrm>
-          <a:off x="0" y="0"/>
-          <a:ext cx="0" cy="0"/>
-          <a:chOff x="0" y="0"/>
-          <a:chExt cx="0" cy="0"/>
-        </a:xfrm>
-      </p:grpSpPr>
-    </p:spTree>
-  </p:cSld>
-  <p:clrMapOvr>
-    <a:masterClrMapping/>
-  </p:clrMapOvr>
-</p:sld>
-</file>
-
-<file path=ppt/slides/slide15.xml><?xml version="1.0" encoding="utf-8"?>
-<p:sld xmlns:a="http://schemas.openxmlformats.org/drawingml/2006/main" xmlns:r="http://schemas.openxmlformats.org/officeDocument/2006/relationships" xmlns:p="http://schemas.openxmlformats.org/presentationml/2006/main">
-  <p:cSld name="Slide 15">
     <p:bg>
       <p:bgPr>
         <a:blipFill dpi="0" rotWithShape="1">

--- a/02-models/slides.pptx
+++ b/02-models/slides.pptx
@@ -19,9 +19,11 @@
     <p:sldId id="267" r:id="rId13"/>
     <p:sldId id="268" r:id="rId14"/>
     <p:sldId id="269" r:id="rId15"/>
+    <p:sldId id="270" r:id="rId16"/>
+    <p:sldId id="271" r:id="rId17"/>
   </p:sldIdLst>
   <p:notesMasterIdLst>
-    <p:notesMasterId r:id="rId16"/>
+    <p:notesMasterId r:id="rId18"/>
   </p:notesMasterIdLst>
   <p:sldSz cx="12192000" cy="6858000"/>
   <p:notesSz cx="6858000" cy="12192000"/>
@@ -967,6 +969,188 @@
           <a:p>
             <a:r>
               <a:rPr lang="en-US" dirty="0"/>
+              <a:t>The open reference. Components are usable standalone or as the full Community
+Distribution. Keep the real names: Spark Operator, Notebooks, Trainer, Katib,
+Hub. KServe is an *ecosystem* project (with Feast, Elyra), not a core component.
+Everything runs on Kubernetes — that's Layer 1.</a:t>
+            </a:r>
+            <a:endParaRPr lang="en-US" dirty="0"/>
+          </a:p>
+        </p:txBody>
+      </p:sp>
+      <p:sp>
+        <p:nvSpPr>
+          <p:cNvPr id="4" name="Slide Number Placeholder 3"/>
+          <p:cNvSpPr>
+            <a:spLocks noGrp="1"/>
+          </p:cNvSpPr>
+          <p:nvPr>
+            <p:ph type="sldNum" sz="quarter" idx="10"/>
+          </p:nvPr>
+        </p:nvSpPr>
+        <p:spPr/>
+        <p:txBody>
+          <a:bodyPr/>
+          <a:lstStyle/>
+          <a:p>
+            <a:fld id="{F7021451-1387-4CA6-816F-3879F97B5CBC}" type="slidenum">
+              <a:rPr lang="en-US"/>
+              <a:t>14</a:t>
+            </a:fld>
+            <a:endParaRPr lang="en-US"/>
+          </a:p>
+        </p:txBody>
+      </p:sp>
+    </p:spTree>
+    <p:extLst>
+      <p:ext uri="{BB962C8B-B14F-4D97-AF65-F5344CB8AC3E}">
+        <p14:creationId xmlns:p14="http://schemas.microsoft.com/office/powerpoint/2010/main" val="1024086991"/>
+      </p:ext>
+    </p:extLst>
+  </p:cSld>
+  <p:clrMapOvr>
+    <a:masterClrMapping/>
+  </p:clrMapOvr>
+</p:notes>
+</file>
+
+<file path=ppt/notesSlides/notesSlide15.xml><?xml version="1.0" encoding="utf-8"?>
+<p:notes xmlns:a="http://schemas.openxmlformats.org/drawingml/2006/main" xmlns:r="http://schemas.openxmlformats.org/officeDocument/2006/relationships" xmlns:p="http://schemas.openxmlformats.org/presentationml/2006/main">
+  <p:cSld>
+    <p:spTree>
+      <p:nvGrpSpPr>
+        <p:cNvPr id="1" name=""/>
+        <p:cNvGrpSpPr/>
+        <p:nvPr/>
+      </p:nvGrpSpPr>
+      <p:grpSpPr>
+        <a:xfrm>
+          <a:off x="0" y="0"/>
+          <a:ext cx="0" cy="0"/>
+          <a:chOff x="0" y="0"/>
+          <a:chExt cx="0" cy="0"/>
+        </a:xfrm>
+      </p:grpSpPr>
+      <p:sp>
+        <p:nvSpPr>
+          <p:cNvPr id="2" name="Slide Image Placeholder 1"/>
+          <p:cNvSpPr>
+            <a:spLocks noGrp="1" noRot="1" noChangeAspect="1"/>
+          </p:cNvSpPr>
+          <p:nvPr>
+            <p:ph type="sldImg"/>
+          </p:nvPr>
+        </p:nvSpPr>
+        <p:spPr/>
+      </p:sp>
+      <p:sp>
+        <p:nvSpPr>
+          <p:cNvPr id="3" name="Notes Placeholder 2"/>
+          <p:cNvSpPr>
+            <a:spLocks noGrp="1"/>
+          </p:cNvSpPr>
+          <p:nvPr>
+            <p:ph type="body" idx="1"/>
+          </p:nvPr>
+        </p:nvSpPr>
+        <p:spPr/>
+        <p:txBody>
+          <a:bodyPr/>
+          <a:lstStyle/>
+          <a:p>
+            <a:r>
+              <a:rPr lang="en-US" dirty="0"/>
+              <a:t>The managed counterpart: the identical lifecycle as AWS services, no cluster to
+run. Training Jobs ≈ Trainer, Automatic Model Tuning ≈ Katib, Endpoints ≈ KServe,
+Model Registry ≈ Hub, SageMaker Pipelines ≈ Kubeflow Pipelines. Lab 2′ runs the
+fine-tune here as a Training Job from a single train.py.</a:t>
+            </a:r>
+            <a:endParaRPr lang="en-US" dirty="0"/>
+          </a:p>
+        </p:txBody>
+      </p:sp>
+      <p:sp>
+        <p:nvSpPr>
+          <p:cNvPr id="4" name="Slide Number Placeholder 3"/>
+          <p:cNvSpPr>
+            <a:spLocks noGrp="1"/>
+          </p:cNvSpPr>
+          <p:nvPr>
+            <p:ph type="sldNum" sz="quarter" idx="10"/>
+          </p:nvPr>
+        </p:nvSpPr>
+        <p:spPr/>
+        <p:txBody>
+          <a:bodyPr/>
+          <a:lstStyle/>
+          <a:p>
+            <a:fld id="{F7021451-1387-4CA6-816F-3879F97B5CBC}" type="slidenum">
+              <a:rPr lang="en-US"/>
+              <a:t>15</a:t>
+            </a:fld>
+            <a:endParaRPr lang="en-US"/>
+          </a:p>
+        </p:txBody>
+      </p:sp>
+    </p:spTree>
+    <p:extLst>
+      <p:ext uri="{BB962C8B-B14F-4D97-AF65-F5344CB8AC3E}">
+        <p14:creationId xmlns:p14="http://schemas.microsoft.com/office/powerpoint/2010/main" val="1024086991"/>
+      </p:ext>
+    </p:extLst>
+  </p:cSld>
+  <p:clrMapOvr>
+    <a:masterClrMapping/>
+  </p:clrMapOvr>
+</p:notes>
+</file>
+
+<file path=ppt/notesSlides/notesSlide16.xml><?xml version="1.0" encoding="utf-8"?>
+<p:notes xmlns:a="http://schemas.openxmlformats.org/drawingml/2006/main" xmlns:r="http://schemas.openxmlformats.org/officeDocument/2006/relationships" xmlns:p="http://schemas.openxmlformats.org/presentationml/2006/main">
+  <p:cSld>
+    <p:spTree>
+      <p:nvGrpSpPr>
+        <p:cNvPr id="1" name=""/>
+        <p:cNvGrpSpPr/>
+        <p:nvPr/>
+      </p:nvGrpSpPr>
+      <p:grpSpPr>
+        <a:xfrm>
+          <a:off x="0" y="0"/>
+          <a:ext cx="0" cy="0"/>
+          <a:chOff x="0" y="0"/>
+          <a:chExt cx="0" cy="0"/>
+        </a:xfrm>
+      </p:grpSpPr>
+      <p:sp>
+        <p:nvSpPr>
+          <p:cNvPr id="2" name="Slide Image Placeholder 1"/>
+          <p:cNvSpPr>
+            <a:spLocks noGrp="1" noRot="1" noChangeAspect="1"/>
+          </p:cNvSpPr>
+          <p:nvPr>
+            <p:ph type="sldImg"/>
+          </p:nvPr>
+        </p:nvSpPr>
+        <p:spPr/>
+      </p:sp>
+      <p:sp>
+        <p:nvSpPr>
+          <p:cNvPr id="3" name="Notes Placeholder 2"/>
+          <p:cNvSpPr>
+            <a:spLocks noGrp="1"/>
+          </p:cNvSpPr>
+          <p:nvPr>
+            <p:ph type="body" idx="1"/>
+          </p:nvPr>
+        </p:nvSpPr>
+        <p:spPr/>
+        <p:txBody>
+          <a:bodyPr/>
+          <a:lstStyle/>
+          <a:p>
+            <a:r>
+              <a:rPr lang="en-US" dirty="0"/>
               <a:t>The part builders use. Students already build oracles and genies. Bostrom's
 ranking (oracle/tool safe, sovereign risky) is a real design choice in layer 4.</a:t>
             </a:r>
@@ -991,7 +1175,7 @@
           <a:p>
             <a:fld id="{F7021451-1387-4CA6-816F-3879F97B5CBC}" type="slidenum">
               <a:rPr lang="en-US"/>
-              <a:t>14</a:t>
+              <a:t>16</a:t>
             </a:fld>
             <a:endParaRPr lang="en-US"/>
           </a:p>
@@ -2229,6 +2413,84 @@
 <file path=ppt/slides/slide14.xml><?xml version="1.0" encoding="utf-8"?>
 <p:sld xmlns:a="http://schemas.openxmlformats.org/drawingml/2006/main" xmlns:r="http://schemas.openxmlformats.org/officeDocument/2006/relationships" xmlns:p="http://schemas.openxmlformats.org/presentationml/2006/main">
   <p:cSld name="Slide 14">
+    <p:bg>
+      <p:bgPr>
+        <a:blipFill dpi="0" rotWithShape="1">
+          <a:blip r:embed="rId1">
+            <a:lum/>
+          </a:blip>
+          <a:srcRect/>
+          <a:stretch>
+            <a:fillRect/>
+          </a:stretch>
+        </a:blipFill>
+        <a:effectLst/>
+      </p:bgPr>
+    </p:bg>
+    <p:spTree>
+      <p:nvGrpSpPr>
+        <p:cNvPr id="1" name=""/>
+        <p:cNvGrpSpPr/>
+        <p:nvPr/>
+      </p:nvGrpSpPr>
+      <p:grpSpPr>
+        <a:xfrm>
+          <a:off x="0" y="0"/>
+          <a:ext cx="0" cy="0"/>
+          <a:chOff x="0" y="0"/>
+          <a:chExt cx="0" cy="0"/>
+        </a:xfrm>
+      </p:grpSpPr>
+    </p:spTree>
+  </p:cSld>
+  <p:clrMapOvr>
+    <a:masterClrMapping/>
+  </p:clrMapOvr>
+</p:sld>
+</file>
+
+<file path=ppt/slides/slide15.xml><?xml version="1.0" encoding="utf-8"?>
+<p:sld xmlns:a="http://schemas.openxmlformats.org/drawingml/2006/main" xmlns:r="http://schemas.openxmlformats.org/officeDocument/2006/relationships" xmlns:p="http://schemas.openxmlformats.org/presentationml/2006/main">
+  <p:cSld name="Slide 15">
+    <p:bg>
+      <p:bgPr>
+        <a:blipFill dpi="0" rotWithShape="1">
+          <a:blip r:embed="rId1">
+            <a:lum/>
+          </a:blip>
+          <a:srcRect/>
+          <a:stretch>
+            <a:fillRect/>
+          </a:stretch>
+        </a:blipFill>
+        <a:effectLst/>
+      </p:bgPr>
+    </p:bg>
+    <p:spTree>
+      <p:nvGrpSpPr>
+        <p:cNvPr id="1" name=""/>
+        <p:cNvGrpSpPr/>
+        <p:nvPr/>
+      </p:nvGrpSpPr>
+      <p:grpSpPr>
+        <a:xfrm>
+          <a:off x="0" y="0"/>
+          <a:ext cx="0" cy="0"/>
+          <a:chOff x="0" y="0"/>
+          <a:chExt cx="0" cy="0"/>
+        </a:xfrm>
+      </p:grpSpPr>
+    </p:spTree>
+  </p:cSld>
+  <p:clrMapOvr>
+    <a:masterClrMapping/>
+  </p:clrMapOvr>
+</p:sld>
+</file>
+
+<file path=ppt/slides/slide16.xml><?xml version="1.0" encoding="utf-8"?>
+<p:sld xmlns:a="http://schemas.openxmlformats.org/drawingml/2006/main" xmlns:r="http://schemas.openxmlformats.org/officeDocument/2006/relationships" xmlns:p="http://schemas.openxmlformats.org/presentationml/2006/main">
+  <p:cSld name="Slide 16">
     <p:bg>
       <p:bgPr>
         <a:blipFill dpi="0" rotWithShape="1">

--- a/02-models/slides.pptx
+++ b/02-models/slides.pptx
@@ -20,10 +20,9 @@
     <p:sldId id="268" r:id="rId14"/>
     <p:sldId id="269" r:id="rId15"/>
     <p:sldId id="270" r:id="rId16"/>
-    <p:sldId id="271" r:id="rId17"/>
   </p:sldIdLst>
   <p:notesMasterIdLst>
-    <p:notesMasterId r:id="rId18"/>
+    <p:notesMasterId r:id="rId17"/>
   </p:notesMasterIdLst>
   <p:sldSz cx="12192000" cy="6858000"/>
   <p:notesSz cx="6858000" cy="12192000"/>
@@ -876,99 +875,6 @@
           <a:p>
             <a:r>
               <a:rPr lang="en-US" dirty="0"/>
-              <a:t>The capstone: our seven phases aren't ad-hoc — they're the lifecycle every
-platform implements. Kubeflow = open, on your Kubernetes; SageMaker = AWS-managed,
-same stages. Keep Kubeflow's real component names. The labs/kubeflow-sagemaker/
-lab re-expresses the Kaggle fine-tune in both: Kubeflow Trainer takes a function,
-SageMaker takes a script, both run the identical train.py. The eval gate (Lab 3)
-becomes a Pipelines step that blocks a regressed deploy.</a:t>
-            </a:r>
-            <a:endParaRPr lang="en-US" dirty="0"/>
-          </a:p>
-        </p:txBody>
-      </p:sp>
-      <p:sp>
-        <p:nvSpPr>
-          <p:cNvPr id="4" name="Slide Number Placeholder 3"/>
-          <p:cNvSpPr>
-            <a:spLocks noGrp="1"/>
-          </p:cNvSpPr>
-          <p:nvPr>
-            <p:ph type="sldNum" sz="quarter" idx="10"/>
-          </p:nvPr>
-        </p:nvSpPr>
-        <p:spPr/>
-        <p:txBody>
-          <a:bodyPr/>
-          <a:lstStyle/>
-          <a:p>
-            <a:fld id="{F7021451-1387-4CA6-816F-3879F97B5CBC}" type="slidenum">
-              <a:rPr lang="en-US"/>
-              <a:t>13</a:t>
-            </a:fld>
-            <a:endParaRPr lang="en-US"/>
-          </a:p>
-        </p:txBody>
-      </p:sp>
-    </p:spTree>
-    <p:extLst>
-      <p:ext uri="{BB962C8B-B14F-4D97-AF65-F5344CB8AC3E}">
-        <p14:creationId xmlns:p14="http://schemas.microsoft.com/office/powerpoint/2010/main" val="1024086991"/>
-      </p:ext>
-    </p:extLst>
-  </p:cSld>
-  <p:clrMapOvr>
-    <a:masterClrMapping/>
-  </p:clrMapOvr>
-</p:notes>
-</file>
-
-<file path=ppt/notesSlides/notesSlide14.xml><?xml version="1.0" encoding="utf-8"?>
-<p:notes xmlns:a="http://schemas.openxmlformats.org/drawingml/2006/main" xmlns:r="http://schemas.openxmlformats.org/officeDocument/2006/relationships" xmlns:p="http://schemas.openxmlformats.org/presentationml/2006/main">
-  <p:cSld>
-    <p:spTree>
-      <p:nvGrpSpPr>
-        <p:cNvPr id="1" name=""/>
-        <p:cNvGrpSpPr/>
-        <p:nvPr/>
-      </p:nvGrpSpPr>
-      <p:grpSpPr>
-        <a:xfrm>
-          <a:off x="0" y="0"/>
-          <a:ext cx="0" cy="0"/>
-          <a:chOff x="0" y="0"/>
-          <a:chExt cx="0" cy="0"/>
-        </a:xfrm>
-      </p:grpSpPr>
-      <p:sp>
-        <p:nvSpPr>
-          <p:cNvPr id="2" name="Slide Image Placeholder 1"/>
-          <p:cNvSpPr>
-            <a:spLocks noGrp="1" noRot="1" noChangeAspect="1"/>
-          </p:cNvSpPr>
-          <p:nvPr>
-            <p:ph type="sldImg"/>
-          </p:nvPr>
-        </p:nvSpPr>
-        <p:spPr/>
-      </p:sp>
-      <p:sp>
-        <p:nvSpPr>
-          <p:cNvPr id="3" name="Notes Placeholder 2"/>
-          <p:cNvSpPr>
-            <a:spLocks noGrp="1"/>
-          </p:cNvSpPr>
-          <p:nvPr>
-            <p:ph type="body" idx="1"/>
-          </p:nvPr>
-        </p:nvSpPr>
-        <p:spPr/>
-        <p:txBody>
-          <a:bodyPr/>
-          <a:lstStyle/>
-          <a:p>
-            <a:r>
-              <a:rPr lang="en-US" dirty="0"/>
               <a:t>The open reference. Components are usable standalone or as the full Community
 Distribution. Keep the real names: Spark Operator, Notebooks, Trainer, Katib,
 Hub. KServe is an *ecosystem* project (with Feast, Elyra), not a core component.
@@ -995,7 +901,7 @@
           <a:p>
             <a:fld id="{F7021451-1387-4CA6-816F-3879F97B5CBC}" type="slidenum">
               <a:rPr lang="en-US"/>
-              <a:t>14</a:t>
+              <a:t>13</a:t>
             </a:fld>
             <a:endParaRPr lang="en-US"/>
           </a:p>
@@ -1014,7 +920,7 @@
 </p:notes>
 </file>
 
-<file path=ppt/notesSlides/notesSlide15.xml><?xml version="1.0" encoding="utf-8"?>
+<file path=ppt/notesSlides/notesSlide14.xml><?xml version="1.0" encoding="utf-8"?>
 <p:notes xmlns:a="http://schemas.openxmlformats.org/drawingml/2006/main" xmlns:r="http://schemas.openxmlformats.org/officeDocument/2006/relationships" xmlns:p="http://schemas.openxmlformats.org/presentationml/2006/main">
   <p:cSld>
     <p:spTree>
@@ -1086,7 +992,7 @@
           <a:p>
             <a:fld id="{F7021451-1387-4CA6-816F-3879F97B5CBC}" type="slidenum">
               <a:rPr lang="en-US"/>
-              <a:t>15</a:t>
+              <a:t>14</a:t>
             </a:fld>
             <a:endParaRPr lang="en-US"/>
           </a:p>
@@ -1105,7 +1011,7 @@
 </p:notes>
 </file>
 
-<file path=ppt/notesSlides/notesSlide16.xml><?xml version="1.0" encoding="utf-8"?>
+<file path=ppt/notesSlides/notesSlide15.xml><?xml version="1.0" encoding="utf-8"?>
 <p:notes xmlns:a="http://schemas.openxmlformats.org/drawingml/2006/main" xmlns:r="http://schemas.openxmlformats.org/officeDocument/2006/relationships" xmlns:p="http://schemas.openxmlformats.org/presentationml/2006/main">
   <p:cSld>
     <p:spTree>
@@ -1175,7 +1081,7 @@
           <a:p>
             <a:fld id="{F7021451-1387-4CA6-816F-3879F97B5CBC}" type="slidenum">
               <a:rPr lang="en-US"/>
-              <a:t>16</a:t>
+              <a:t>15</a:t>
             </a:fld>
             <a:endParaRPr lang="en-US"/>
           </a:p>
@@ -2452,45 +2358,6 @@
 <file path=ppt/slides/slide15.xml><?xml version="1.0" encoding="utf-8"?>
 <p:sld xmlns:a="http://schemas.openxmlformats.org/drawingml/2006/main" xmlns:r="http://schemas.openxmlformats.org/officeDocument/2006/relationships" xmlns:p="http://schemas.openxmlformats.org/presentationml/2006/main">
   <p:cSld name="Slide 15">
-    <p:bg>
-      <p:bgPr>
-        <a:blipFill dpi="0" rotWithShape="1">
-          <a:blip r:embed="rId1">
-            <a:lum/>
-          </a:blip>
-          <a:srcRect/>
-          <a:stretch>
-            <a:fillRect/>
-          </a:stretch>
-        </a:blipFill>
-        <a:effectLst/>
-      </p:bgPr>
-    </p:bg>
-    <p:spTree>
-      <p:nvGrpSpPr>
-        <p:cNvPr id="1" name=""/>
-        <p:cNvGrpSpPr/>
-        <p:nvPr/>
-      </p:nvGrpSpPr>
-      <p:grpSpPr>
-        <a:xfrm>
-          <a:off x="0" y="0"/>
-          <a:ext cx="0" cy="0"/>
-          <a:chOff x="0" y="0"/>
-          <a:chExt cx="0" cy="0"/>
-        </a:xfrm>
-      </p:grpSpPr>
-    </p:spTree>
-  </p:cSld>
-  <p:clrMapOvr>
-    <a:masterClrMapping/>
-  </p:clrMapOvr>
-</p:sld>
-</file>
-
-<file path=ppt/slides/slide16.xml><?xml version="1.0" encoding="utf-8"?>
-<p:sld xmlns:a="http://schemas.openxmlformats.org/drawingml/2006/main" xmlns:r="http://schemas.openxmlformats.org/officeDocument/2006/relationships" xmlns:p="http://schemas.openxmlformats.org/presentationml/2006/main">
-  <p:cSld name="Slide 16">
     <p:bg>
       <p:bgPr>
         <a:blipFill dpi="0" rotWithShape="1">
